--- a/deck/interview-deck.pptx
+++ b/deck/interview-deck.pptx
@@ -9444,7 +9444,7 @@
                 </a:solidFill>
                 <a:latin typeface="Arial"/>
               </a:rPr>
-              <a:t>47 scenarios in 8 stories. The build refuses a story whose error path is not in the state model.</a:t>
+              <a:t>54 scenarios in 8 stories. The build refuses a story whose error path is not in the state model.</a:t>
             </a:r>
           </a:p>
         </p:txBody>
